--- a/submission/pitch-deck.pptx
+++ b/submission/pitch-deck.pptx
@@ -3296,7 +3296,7 @@
                 </a:solidFill>
                 <a:latin typeface="Arial"/>
               </a:rPr>
-              <a:t>Stopping scam-driven transfers inside the bank's authorisation path —</a:t>
+              <a:t>Stopping scam-driven transfers inside the bank's authorisation path,</a:t>
             </a:r>
           </a:p>
           <a:p>
@@ -5062,7 +5062,7 @@
                 </a:solidFill>
                 <a:latin typeface="Arial"/>
               </a:rPr>
-              <a:t>The people who could actually stop it — the adult children — have no way in.</a:t>
+              <a:t>The adult children who could actually stop it have no way in.</a:t>
             </a:r>
           </a:p>
         </p:txBody>
@@ -6033,7 +6033,7 @@
                 </a:solidFill>
                 <a:latin typeface="Arial"/>
               </a:rPr>
-              <a:t>CONFIRM is not just a block. It recruits the one person</a:t>
+              <a:t>CONFIRM pauses the transfer and brings in the one person</a:t>
             </a:r>
           </a:p>
           <a:p>
@@ -6049,7 +6049,7 @@
                 </a:solidFill>
                 <a:latin typeface="Arial"/>
               </a:rPr>
-              <a:t>who can actually stop the scam: the family.</a:t>
+              <a:t>who can end the call: the family.</a:t>
             </a:r>
           </a:p>
         </p:txBody>
@@ -7195,7 +7195,7 @@
                 </a:solidFill>
                 <a:latin typeface="Arial"/>
               </a:rPr>
-              <a:t>The accelerator sits on-die, not behind a GPU bus — which is why</a:t>
+              <a:t>The accelerator sits on the same die as the CPU, which is why</a:t>
             </a:r>
           </a:p>
           <a:p>
@@ -10151,7 +10151,7 @@
                 </a:solidFill>
                 <a:latin typeface="Arial"/>
               </a:rPr>
-              <a:t>over time — a requirement in most regulated markets.</a:t>
+              <a:t>over time, which most regulated markets require.</a:t>
             </a:r>
           </a:p>
         </p:txBody>
@@ -10413,7 +10413,7 @@
                 </a:solidFill>
                 <a:latin typeface="Arial"/>
               </a:rPr>
-              <a:t>What this prototype is — and is not</a:t>
+              <a:t>What this prototype is and is not</a:t>
             </a:r>
           </a:p>
         </p:txBody>
@@ -10856,7 +10856,7 @@
                 </a:solidFill>
                 <a:latin typeface="Arial"/>
               </a:rPr>
-              <a:t>·  No live bank core integration — the stream is historical replay</a:t>
+              <a:t>·  No live bank core integration; the stream is historical replay</a:t>
             </a:r>
           </a:p>
         </p:txBody>

--- a/submission/pitch-deck.pptx
+++ b/submission/pitch-deck.pptx
@@ -4618,8 +4618,8 @@
         </p:nvSpPr>
         <p:spPr>
           <a:xfrm>
-            <a:off x="822960" y="3127248"/>
-            <a:ext cx="10515600" cy="566928"/>
+            <a:off x="822960" y="3017520"/>
+            <a:ext cx="10515600" cy="896112"/>
           </a:xfrm>
           <a:prstGeom prst="rect">
             <a:avLst/>
@@ -4664,8 +4664,8 @@
         </p:nvSpPr>
         <p:spPr>
           <a:xfrm>
-            <a:off x="1051560" y="3264408"/>
-            <a:ext cx="10058400" cy="320040"/>
+            <a:off x="1051560" y="3127248"/>
+            <a:ext cx="10058400" cy="310896"/>
           </a:xfrm>
           <a:prstGeom prst="rect">
             <a:avLst/>
@@ -4684,7 +4684,7 @@
               </a:lnSpc>
             </a:pPr>
             <a:r>
-              <a:rPr sz="1400" b="1" i="0">
+              <a:rPr sz="1350" b="1" i="0">
                 <a:solidFill>
                   <a:srgbClr val="DC2626"/>
                 </a:solidFill>
@@ -4697,14 +4697,53 @@
       </p:sp>
       <p:sp>
         <p:nvSpPr>
-          <p:cNvPr id="23" name="Rectangle 22"/>
+          <p:cNvPr id="23" name="TextBox 22"/>
+          <p:cNvSpPr txBox="1"/>
+          <p:nvPr/>
+        </p:nvSpPr>
+        <p:spPr>
+          <a:xfrm>
+            <a:off x="1051560" y="3474720"/>
+            <a:ext cx="10058400" cy="347472"/>
+          </a:xfrm>
+          <a:prstGeom prst="rect">
+            <a:avLst/>
+          </a:prstGeom>
+          <a:noFill/>
+        </p:spPr>
+        <p:txBody>
+          <a:bodyPr wrap="square" anchor="t">
+            <a:spAutoFit/>
+          </a:bodyPr>
+          <a:lstStyle/>
+          <a:p>
+            <a:pPr algn="l">
+              <a:lnSpc>
+                <a:spcPct val="100000"/>
+              </a:lnSpc>
+            </a:pPr>
+            <a:r>
+              <a:rPr sz="1050" b="0" i="0">
+                <a:solidFill>
+                  <a:srgbClr val="8A3A3A"/>
+                </a:solidFill>
+                <a:latin typeface="Arial"/>
+              </a:rPr>
+              <a:t>$4.885 billion reported lost by older Americans in 2024 across 147,127 complaints, up 43% on 2023.  FBI IC3, 2025</a:t>
+            </a:r>
+          </a:p>
+        </p:txBody>
+      </p:sp>
+      <p:sp>
+        <p:nvSpPr>
+          <p:cNvPr id="24" name="Rectangle 23"/>
           <p:cNvSpPr/>
           <p:nvPr/>
         </p:nvSpPr>
         <p:spPr>
           <a:xfrm>
-            <a:off x="822960" y="3977639"/>
-            <a:ext cx="3291840" cy="1691640"/>
+            <a:off x="822960" y="4133087"/>
+            <a:ext cx="3291840" cy="1645920"/>
           </a:xfrm>
           <a:prstGeom prst="rect">
             <a:avLst/>
@@ -4743,13 +4782,13 @@
       </p:sp>
       <p:sp>
         <p:nvSpPr>
-          <p:cNvPr id="24" name="TextBox 23"/>
-          <p:cNvSpPr txBox="1"/>
-          <p:nvPr/>
-        </p:nvSpPr>
-        <p:spPr>
-          <a:xfrm>
-            <a:off x="1051560" y="4160520"/>
+          <p:cNvPr id="25" name="TextBox 24"/>
+          <p:cNvSpPr txBox="1"/>
+          <p:nvPr/>
+        </p:nvSpPr>
+        <p:spPr>
+          <a:xfrm>
+            <a:off x="1051560" y="4279392"/>
             <a:ext cx="2834640" cy="365760"/>
           </a:xfrm>
           <a:prstGeom prst="rect">
@@ -4782,13 +4821,13 @@
       </p:sp>
       <p:sp>
         <p:nvSpPr>
-          <p:cNvPr id="25" name="TextBox 24"/>
-          <p:cNvSpPr txBox="1"/>
-          <p:nvPr/>
-        </p:nvSpPr>
-        <p:spPr>
-          <a:xfrm>
-            <a:off x="1051560" y="4553712"/>
+          <p:cNvPr id="26" name="TextBox 25"/>
+          <p:cNvSpPr txBox="1"/>
+          <p:nvPr/>
+        </p:nvSpPr>
+        <p:spPr>
+          <a:xfrm>
+            <a:off x="1051560" y="4663440"/>
             <a:ext cx="2834640" cy="1005840"/>
           </a:xfrm>
           <a:prstGeom prst="rect">
@@ -4821,14 +4860,14 @@
       </p:sp>
       <p:sp>
         <p:nvSpPr>
-          <p:cNvPr id="26" name="Rectangle 25"/>
+          <p:cNvPr id="27" name="Rectangle 26"/>
           <p:cNvSpPr/>
           <p:nvPr/>
         </p:nvSpPr>
         <p:spPr>
           <a:xfrm>
-            <a:off x="4389120" y="3977639"/>
-            <a:ext cx="3291840" cy="1691640"/>
+            <a:off x="4389120" y="4133087"/>
+            <a:ext cx="3291840" cy="1645920"/>
           </a:xfrm>
           <a:prstGeom prst="rect">
             <a:avLst/>
@@ -4867,13 +4906,13 @@
       </p:sp>
       <p:sp>
         <p:nvSpPr>
-          <p:cNvPr id="27" name="TextBox 26"/>
-          <p:cNvSpPr txBox="1"/>
-          <p:nvPr/>
-        </p:nvSpPr>
-        <p:spPr>
-          <a:xfrm>
-            <a:off x="4617720" y="4160520"/>
+          <p:cNvPr id="28" name="TextBox 27"/>
+          <p:cNvSpPr txBox="1"/>
+          <p:nvPr/>
+        </p:nvSpPr>
+        <p:spPr>
+          <a:xfrm>
+            <a:off x="4617720" y="4279392"/>
             <a:ext cx="2834640" cy="365760"/>
           </a:xfrm>
           <a:prstGeom prst="rect">
@@ -4906,13 +4945,13 @@
       </p:sp>
       <p:sp>
         <p:nvSpPr>
-          <p:cNvPr id="28" name="TextBox 27"/>
-          <p:cNvSpPr txBox="1"/>
-          <p:nvPr/>
-        </p:nvSpPr>
-        <p:spPr>
-          <a:xfrm>
-            <a:off x="4617720" y="4553712"/>
+          <p:cNvPr id="29" name="TextBox 28"/>
+          <p:cNvSpPr txBox="1"/>
+          <p:nvPr/>
+        </p:nvSpPr>
+        <p:spPr>
+          <a:xfrm>
+            <a:off x="4617720" y="4663440"/>
             <a:ext cx="2834640" cy="1005840"/>
           </a:xfrm>
           <a:prstGeom prst="rect">
@@ -4945,14 +4984,14 @@
       </p:sp>
       <p:sp>
         <p:nvSpPr>
-          <p:cNvPr id="29" name="Rectangle 28"/>
+          <p:cNvPr id="30" name="Rectangle 29"/>
           <p:cNvSpPr/>
           <p:nvPr/>
         </p:nvSpPr>
         <p:spPr>
           <a:xfrm>
-            <a:off x="7955279" y="3977639"/>
-            <a:ext cx="3291840" cy="1691640"/>
+            <a:off x="7955279" y="4133087"/>
+            <a:ext cx="3291840" cy="1645920"/>
           </a:xfrm>
           <a:prstGeom prst="rect">
             <a:avLst/>
@@ -4991,13 +5030,13 @@
       </p:sp>
       <p:sp>
         <p:nvSpPr>
-          <p:cNvPr id="30" name="TextBox 29"/>
-          <p:cNvSpPr txBox="1"/>
-          <p:nvPr/>
-        </p:nvSpPr>
-        <p:spPr>
-          <a:xfrm>
-            <a:off x="8183879" y="4160520"/>
+          <p:cNvPr id="31" name="TextBox 30"/>
+          <p:cNvSpPr txBox="1"/>
+          <p:nvPr/>
+        </p:nvSpPr>
+        <p:spPr>
+          <a:xfrm>
+            <a:off x="8183879" y="4279392"/>
             <a:ext cx="2834640" cy="365760"/>
           </a:xfrm>
           <a:prstGeom prst="rect">
@@ -5030,13 +5069,13 @@
       </p:sp>
       <p:sp>
         <p:nvSpPr>
-          <p:cNvPr id="31" name="TextBox 30"/>
-          <p:cNvSpPr txBox="1"/>
-          <p:nvPr/>
-        </p:nvSpPr>
-        <p:spPr>
-          <a:xfrm>
-            <a:off x="8183879" y="4553712"/>
+          <p:cNvPr id="32" name="TextBox 31"/>
+          <p:cNvSpPr txBox="1"/>
+          <p:nvPr/>
+        </p:nvSpPr>
+        <p:spPr>
+          <a:xfrm>
+            <a:off x="8183879" y="4663440"/>
             <a:ext cx="2834640" cy="1005840"/>
           </a:xfrm>
           <a:prstGeom prst="rect">
@@ -5069,7 +5108,7 @@
       </p:sp>
       <p:sp>
         <p:nvSpPr>
-          <p:cNvPr id="32" name="TextBox 31"/>
+          <p:cNvPr id="33" name="TextBox 32"/>
           <p:cNvSpPr txBox="1"/>
           <p:nvPr/>
         </p:nvSpPr>
@@ -5108,7 +5147,7 @@
       </p:sp>
       <p:sp>
         <p:nvSpPr>
-          <p:cNvPr id="33" name="TextBox 32"/>
+          <p:cNvPr id="34" name="TextBox 33"/>
           <p:cNvSpPr txBox="1"/>
           <p:nvPr/>
         </p:nvSpPr>

--- a/submission/pitch-deck.pptx
+++ b/submission/pitch-deck.pptx
@@ -4938,7 +4938,7 @@
                 </a:solidFill>
                 <a:latin typeface="Arial"/>
               </a:rPr>
-              <a:t>Existing systems target card fraud</a:t>
+              <a:t>Built for card fraud</a:t>
             </a:r>
           </a:p>
         </p:txBody>
@@ -6465,8 +6465,8 @@
         </p:blipFill>
         <p:spPr>
           <a:xfrm>
-            <a:off x="502920" y="1481328"/>
-            <a:ext cx="11201400" cy="6343650"/>
+            <a:off x="1042415" y="1417320"/>
+            <a:ext cx="10002800" cy="4892040"/>
           </a:xfrm>
           <a:prstGeom prst="rect">
             <a:avLst/>
@@ -6476,45 +6476,6 @@
       <p:sp>
         <p:nvSpPr>
           <p:cNvPr id="7" name="TextBox 6"/>
-          <p:cNvSpPr txBox="1"/>
-          <p:nvPr/>
-        </p:nvSpPr>
-        <p:spPr>
-          <a:xfrm>
-            <a:off x="822960" y="6144768"/>
-            <a:ext cx="10515600" cy="274320"/>
-          </a:xfrm>
-          <a:prstGeom prst="rect">
-            <a:avLst/>
-          </a:prstGeom>
-          <a:noFill/>
-        </p:spPr>
-        <p:txBody>
-          <a:bodyPr wrap="square" anchor="t">
-            <a:spAutoFit/>
-          </a:bodyPr>
-          <a:lstStyle/>
-          <a:p>
-            <a:pPr algn="l">
-              <a:lnSpc>
-                <a:spcPct val="100000"/>
-              </a:lnSpc>
-            </a:pPr>
-            <a:r>
-              <a:rPr sz="1000" b="0" i="1">
-                <a:solidFill>
-                  <a:srgbClr val="5C6B80"/>
-                </a:solidFill>
-                <a:latin typeface="Arial"/>
-              </a:rPr>
-              <a:t>Decision and explanation are decoupled: the decision returns in ~22 ms, while IBM Granite explains asynchronously.</a:t>
-            </a:r>
-          </a:p>
-        </p:txBody>
-      </p:sp>
-      <p:sp>
-        <p:nvSpPr>
-          <p:cNvPr id="8" name="TextBox 7"/>
           <p:cNvSpPr txBox="1"/>
           <p:nvPr/>
         </p:nvSpPr>
@@ -6553,7 +6514,7 @@
       </p:sp>
       <p:sp>
         <p:nvSpPr>
-          <p:cNvPr id="9" name="TextBox 8"/>
+          <p:cNvPr id="8" name="TextBox 7"/>
           <p:cNvSpPr txBox="1"/>
           <p:nvPr/>
         </p:nvSpPr>
@@ -6790,8 +6751,8 @@
         </p:blipFill>
         <p:spPr>
           <a:xfrm>
-            <a:off x="1234440" y="1371600"/>
-            <a:ext cx="9022080" cy="5074920"/>
+            <a:off x="1664208" y="1325880"/>
+            <a:ext cx="8859520" cy="4983480"/>
           </a:xfrm>
           <a:prstGeom prst="rect">
             <a:avLst/>
@@ -6801,45 +6762,6 @@
       <p:sp>
         <p:nvSpPr>
           <p:cNvPr id="7" name="TextBox 6"/>
-          <p:cNvSpPr txBox="1"/>
-          <p:nvPr/>
-        </p:nvSpPr>
-        <p:spPr>
-          <a:xfrm>
-            <a:off x="822960" y="6510528"/>
-            <a:ext cx="10515600" cy="274320"/>
-          </a:xfrm>
-          <a:prstGeom prst="rect">
-            <a:avLst/>
-          </a:prstGeom>
-          <a:noFill/>
-        </p:spPr>
-        <p:txBody>
-          <a:bodyPr wrap="square" anchor="t">
-            <a:spAutoFit/>
-          </a:bodyPr>
-          <a:lstStyle/>
-          <a:p>
-            <a:pPr algn="l">
-              <a:lnSpc>
-                <a:spcPct val="100000"/>
-              </a:lnSpc>
-            </a:pPr>
-            <a:r>
-              <a:rPr sz="1000" b="0" i="1">
-                <a:solidFill>
-                  <a:srgbClr val="5C6B80"/>
-                </a:solidFill>
-                <a:latin typeface="Arial"/>
-              </a:rPr>
-              <a:t>Every row is a live decision. Right lane: the plain-language message the holder sees, and the alert the linked relative receives.</a:t>
-            </a:r>
-          </a:p>
-        </p:txBody>
-      </p:sp>
-      <p:sp>
-        <p:nvSpPr>
-          <p:cNvPr id="8" name="TextBox 7"/>
           <p:cNvSpPr txBox="1"/>
           <p:nvPr/>
         </p:nvSpPr>
@@ -6878,7 +6800,7 @@
       </p:sp>
       <p:sp>
         <p:nvSpPr>
-          <p:cNvPr id="9" name="TextBox 8"/>
+          <p:cNvPr id="8" name="TextBox 7"/>
           <p:cNvSpPr txBox="1"/>
           <p:nvPr/>
         </p:nvSpPr>
